--- a/制作物紹介.pptx
+++ b/制作物紹介.pptx
@@ -10,7 +10,8 @@
     <p:sldId id="259" r:id="rId4"/>
     <p:sldId id="258" r:id="rId5"/>
     <p:sldId id="260" r:id="rId6"/>
-    <p:sldId id="261" r:id="rId7"/>
+    <p:sldId id="262" r:id="rId7"/>
+    <p:sldId id="261" r:id="rId8"/>
   </p:sldIdLst>
   <p:sldSz cx="12192000" cy="6858000"/>
   <p:notesSz cx="6858000" cy="9144000"/>
@@ -248,7 +249,7 @@
           <a:p>
             <a:fld id="{FF280E2F-2207-4CE9-9E61-0F84AC327644}" type="datetimeFigureOut">
               <a:rPr kumimoji="1" lang="ja-JP" altLang="en-US" smtClean="0"/>
-              <a:t>2026/8/6</a:t>
+              <a:t>2026/9/28</a:t>
             </a:fld>
             <a:endParaRPr kumimoji="1" lang="ja-JP" altLang="en-US"/>
           </a:p>
@@ -450,7 +451,7 @@
           <a:p>
             <a:fld id="{FF280E2F-2207-4CE9-9E61-0F84AC327644}" type="datetimeFigureOut">
               <a:rPr kumimoji="1" lang="ja-JP" altLang="en-US" smtClean="0"/>
-              <a:t>2026/8/6</a:t>
+              <a:t>2026/9/28</a:t>
             </a:fld>
             <a:endParaRPr kumimoji="1" lang="ja-JP" altLang="en-US"/>
           </a:p>
@@ -662,7 +663,7 @@
           <a:p>
             <a:fld id="{FF280E2F-2207-4CE9-9E61-0F84AC327644}" type="datetimeFigureOut">
               <a:rPr kumimoji="1" lang="ja-JP" altLang="en-US" smtClean="0"/>
-              <a:t>2026/8/6</a:t>
+              <a:t>2026/9/28</a:t>
             </a:fld>
             <a:endParaRPr kumimoji="1" lang="ja-JP" altLang="en-US"/>
           </a:p>
@@ -864,7 +865,7 @@
           <a:p>
             <a:fld id="{FF280E2F-2207-4CE9-9E61-0F84AC327644}" type="datetimeFigureOut">
               <a:rPr kumimoji="1" lang="ja-JP" altLang="en-US" smtClean="0"/>
-              <a:t>2026/8/6</a:t>
+              <a:t>2026/9/28</a:t>
             </a:fld>
             <a:endParaRPr kumimoji="1" lang="ja-JP" altLang="en-US"/>
           </a:p>
@@ -1110,7 +1111,7 @@
           <a:p>
             <a:fld id="{FF280E2F-2207-4CE9-9E61-0F84AC327644}" type="datetimeFigureOut">
               <a:rPr kumimoji="1" lang="ja-JP" altLang="en-US" smtClean="0"/>
-              <a:t>2026/8/6</a:t>
+              <a:t>2026/9/28</a:t>
             </a:fld>
             <a:endParaRPr kumimoji="1" lang="ja-JP" altLang="en-US"/>
           </a:p>
@@ -1406,7 +1407,7 @@
           <a:p>
             <a:fld id="{FF280E2F-2207-4CE9-9E61-0F84AC327644}" type="datetimeFigureOut">
               <a:rPr kumimoji="1" lang="ja-JP" altLang="en-US" smtClean="0"/>
-              <a:t>2026/8/6</a:t>
+              <a:t>2026/9/28</a:t>
             </a:fld>
             <a:endParaRPr kumimoji="1" lang="ja-JP" altLang="en-US"/>
           </a:p>
@@ -1837,7 +1838,7 @@
           <a:p>
             <a:fld id="{FF280E2F-2207-4CE9-9E61-0F84AC327644}" type="datetimeFigureOut">
               <a:rPr kumimoji="1" lang="ja-JP" altLang="en-US" smtClean="0"/>
-              <a:t>2026/8/6</a:t>
+              <a:t>2026/9/28</a:t>
             </a:fld>
             <a:endParaRPr kumimoji="1" lang="ja-JP" altLang="en-US"/>
           </a:p>
@@ -1955,7 +1956,7 @@
           <a:p>
             <a:fld id="{FF280E2F-2207-4CE9-9E61-0F84AC327644}" type="datetimeFigureOut">
               <a:rPr kumimoji="1" lang="ja-JP" altLang="en-US" smtClean="0"/>
-              <a:t>2026/8/6</a:t>
+              <a:t>2026/9/28</a:t>
             </a:fld>
             <a:endParaRPr kumimoji="1" lang="ja-JP" altLang="en-US"/>
           </a:p>
@@ -2050,7 +2051,7 @@
           <a:p>
             <a:fld id="{FF280E2F-2207-4CE9-9E61-0F84AC327644}" type="datetimeFigureOut">
               <a:rPr kumimoji="1" lang="ja-JP" altLang="en-US" smtClean="0"/>
-              <a:t>2026/8/6</a:t>
+              <a:t>2026/9/28</a:t>
             </a:fld>
             <a:endParaRPr kumimoji="1" lang="ja-JP" altLang="en-US"/>
           </a:p>
@@ -2359,7 +2360,7 @@
           <a:p>
             <a:fld id="{FF280E2F-2207-4CE9-9E61-0F84AC327644}" type="datetimeFigureOut">
               <a:rPr kumimoji="1" lang="ja-JP" altLang="en-US" smtClean="0"/>
-              <a:t>2026/8/6</a:t>
+              <a:t>2026/9/28</a:t>
             </a:fld>
             <a:endParaRPr kumimoji="1" lang="ja-JP" altLang="en-US"/>
           </a:p>
@@ -2612,7 +2613,7 @@
           <a:p>
             <a:fld id="{FF280E2F-2207-4CE9-9E61-0F84AC327644}" type="datetimeFigureOut">
               <a:rPr kumimoji="1" lang="ja-JP" altLang="en-US" smtClean="0"/>
-              <a:t>2026/8/6</a:t>
+              <a:t>2026/9/28</a:t>
             </a:fld>
             <a:endParaRPr kumimoji="1" lang="ja-JP" altLang="en-US"/>
           </a:p>
@@ -2857,7 +2858,7 @@
           <a:p>
             <a:fld id="{FF280E2F-2207-4CE9-9E61-0F84AC327644}" type="datetimeFigureOut">
               <a:rPr kumimoji="1" lang="ja-JP" altLang="en-US" smtClean="0"/>
-              <a:t>2026/8/6</a:t>
+              <a:t>2026/9/28</a:t>
             </a:fld>
             <a:endParaRPr kumimoji="1" lang="ja-JP" altLang="en-US"/>
           </a:p>
@@ -3397,7 +3398,7 @@
             </a:r>
             <a:r>
               <a:rPr lang="ja-JP" altLang="en-US" dirty="0" smtClean="0"/>
-              <a:t>期間：２週間程度</a:t>
+              <a:t>期間：１週間程度</a:t>
             </a:r>
             <a:endParaRPr kumimoji="1" lang="ja-JP" altLang="en-US" dirty="0"/>
           </a:p>
@@ -3460,6 +3461,20 @@
             <a:r>
               <a:rPr lang="ja-JP" altLang="en-US" dirty="0" smtClean="0"/>
               <a:t>ステージクリアで手に入れたコインでステータスを強化出来ます。</a:t>
+            </a:r>
+            <a:endParaRPr lang="en-US" altLang="ja-JP" dirty="0" smtClean="0"/>
+          </a:p>
+          <a:p>
+            <a:endParaRPr kumimoji="1" lang="en-US" altLang="ja-JP" dirty="0"/>
+          </a:p>
+          <a:p>
+            <a:r>
+              <a:rPr lang="en-US" altLang="ja-JP" dirty="0" smtClean="0"/>
+              <a:t>※</a:t>
+            </a:r>
+            <a:r>
+              <a:rPr lang="ja-JP" altLang="en-US" dirty="0" smtClean="0"/>
+              <a:t>著作権の関係で著作権フリーの音楽をこちらで選ばせてもらいました。</a:t>
             </a:r>
             <a:endParaRPr kumimoji="1" lang="ja-JP" altLang="en-US" dirty="0"/>
           </a:p>
@@ -3879,13 +3894,13 @@
         </p:nvSpPr>
         <p:spPr>
           <a:xfrm rot="16200000">
-            <a:off x="3434712" y="-818311"/>
-            <a:ext cx="2102685" cy="7295710"/>
+            <a:off x="4540500" y="-1924099"/>
+            <a:ext cx="2666207" cy="10070808"/>
           </a:xfrm>
         </p:spPr>
         <p:txBody>
           <a:bodyPr>
-            <a:normAutofit/>
+            <a:normAutofit fontScale="92500"/>
           </a:bodyPr>
           <a:lstStyle/>
           <a:p>
@@ -3898,8 +3913,50 @@
             </a:r>
             <a:r>
               <a:rPr kumimoji="1" lang="ja-JP" altLang="en-US" dirty="0" smtClean="0"/>
-              <a:t>ファイルを読み込みノーツを生成、からどのようにゲーム性に持っていくのかが苦労した。</a:t>
-            </a:r>
+              <a:t>ファイルを読み込みノーツを生成</a:t>
+            </a:r>
+            <a:r>
+              <a:rPr lang="ja-JP" altLang="en-US" dirty="0" smtClean="0"/>
+              <a:t>する処理に苦労しました。</a:t>
+            </a:r>
+            <a:endParaRPr lang="en-US" altLang="ja-JP" dirty="0" smtClean="0"/>
+          </a:p>
+          <a:p>
+            <a:pPr marL="0" indent="0">
+              <a:buNone/>
+            </a:pPr>
+            <a:r>
+              <a:rPr lang="ja-JP" altLang="en-US" dirty="0"/>
+              <a:t>主</a:t>
+            </a:r>
+            <a:r>
+              <a:rPr lang="ja-JP" altLang="en-US" dirty="0" smtClean="0"/>
+              <a:t>にどのタイミングでノーツを生成するかが、音楽ごとに違い</a:t>
+            </a:r>
+            <a:endParaRPr lang="en-US" altLang="ja-JP" dirty="0" smtClean="0"/>
+          </a:p>
+          <a:p>
+            <a:pPr marL="0" indent="0">
+              <a:buNone/>
+            </a:pPr>
+            <a:r>
+              <a:rPr kumimoji="1" lang="ja-JP" altLang="en-US" dirty="0" smtClean="0"/>
+              <a:t>一定の時間に生成などを使わずリズムゲームとしての要素を残そうと試行錯誤をし、サビ</a:t>
+            </a:r>
+            <a:r>
+              <a:rPr lang="ja-JP" altLang="en-US" dirty="0"/>
+              <a:t>に</a:t>
+            </a:r>
+            <a:r>
+              <a:rPr kumimoji="1" lang="ja-JP" altLang="en-US" dirty="0" smtClean="0"/>
+              <a:t>なるとどの音楽も音量が大きくなるという共通点を見つけ、一定の音量を超えると生成する処理にしました。</a:t>
+            </a:r>
+            <a:endParaRPr kumimoji="1" lang="en-US" altLang="ja-JP" dirty="0" smtClean="0"/>
+          </a:p>
+          <a:p>
+            <a:pPr marL="0" indent="0">
+              <a:buNone/>
+            </a:pPr>
             <a:endParaRPr kumimoji="1" lang="ja-JP" altLang="en-US" dirty="0"/>
           </a:p>
         </p:txBody>
@@ -3943,6 +4000,118 @@
       </p:grpSpPr>
       <p:sp>
         <p:nvSpPr>
+          <p:cNvPr id="2" name="テキスト ボックス 1"/>
+          <p:cNvSpPr txBox="1"/>
+          <p:nvPr/>
+        </p:nvSpPr>
+        <p:spPr>
+          <a:xfrm>
+            <a:off x="1041990" y="680483"/>
+            <a:ext cx="5039833" cy="646331"/>
+          </a:xfrm>
+          <a:prstGeom prst="rect">
+            <a:avLst/>
+          </a:prstGeom>
+          <a:noFill/>
+        </p:spPr>
+        <p:txBody>
+          <a:bodyPr wrap="square" rtlCol="0">
+            <a:spAutoFit/>
+          </a:bodyPr>
+          <a:lstStyle/>
+          <a:p>
+            <a:r>
+              <a:rPr kumimoji="1" lang="ja-JP" altLang="en-US" sz="3600" dirty="0" smtClean="0"/>
+              <a:t>今後の追加したい要素</a:t>
+            </a:r>
+            <a:endParaRPr kumimoji="1" lang="ja-JP" altLang="en-US" sz="3600" dirty="0"/>
+          </a:p>
+        </p:txBody>
+      </p:sp>
+      <p:sp>
+        <p:nvSpPr>
+          <p:cNvPr id="3" name="テキスト ボックス 2"/>
+          <p:cNvSpPr txBox="1"/>
+          <p:nvPr/>
+        </p:nvSpPr>
+        <p:spPr>
+          <a:xfrm>
+            <a:off x="1127051" y="2275367"/>
+            <a:ext cx="9356651" cy="1938992"/>
+          </a:xfrm>
+          <a:prstGeom prst="rect">
+            <a:avLst/>
+          </a:prstGeom>
+          <a:noFill/>
+        </p:spPr>
+        <p:txBody>
+          <a:bodyPr wrap="square" rtlCol="0">
+            <a:spAutoFit/>
+          </a:bodyPr>
+          <a:lstStyle/>
+          <a:p>
+            <a:r>
+              <a:rPr lang="ja-JP" altLang="en-US" sz="2400" dirty="0" smtClean="0"/>
+              <a:t>・最初に</a:t>
+            </a:r>
+            <a:r>
+              <a:rPr lang="en-US" altLang="ja-JP" sz="2400" dirty="0" smtClean="0"/>
+              <a:t>MP.3</a:t>
+            </a:r>
+            <a:r>
+              <a:rPr lang="ja-JP" altLang="en-US" sz="2400" dirty="0" smtClean="0"/>
+              <a:t>ファイルを入れる場所を作り好きな音楽を流せるようにしたい</a:t>
+            </a:r>
+            <a:endParaRPr lang="en-US" altLang="ja-JP" sz="2400" dirty="0" smtClean="0"/>
+          </a:p>
+          <a:p>
+            <a:r>
+              <a:rPr kumimoji="1" lang="ja-JP" altLang="en-US" sz="2400" dirty="0" smtClean="0"/>
+              <a:t>（現状ゲームを作る段階でファイルを入れるしかなく、作成者しか入れない）</a:t>
+            </a:r>
+            <a:endParaRPr kumimoji="1" lang="en-US" altLang="ja-JP" sz="2400" dirty="0" smtClean="0"/>
+          </a:p>
+          <a:p>
+            <a:r>
+              <a:rPr lang="ja-JP" altLang="en-US" sz="2400" dirty="0" smtClean="0"/>
+              <a:t>・ステージをさらに追加しもっと見やすいようにしたい</a:t>
+            </a:r>
+            <a:endParaRPr kumimoji="1" lang="ja-JP" altLang="en-US" sz="2400" dirty="0"/>
+          </a:p>
+        </p:txBody>
+      </p:sp>
+    </p:spTree>
+    <p:extLst>
+      <p:ext uri="{BB962C8B-B14F-4D97-AF65-F5344CB8AC3E}">
+        <p14:creationId xmlns:p14="http://schemas.microsoft.com/office/powerpoint/2010/main" val="1851435434"/>
+      </p:ext>
+    </p:extLst>
+  </p:cSld>
+  <p:clrMapOvr>
+    <a:masterClrMapping/>
+  </p:clrMapOvr>
+</p:sld>
+</file>
+
+<file path=ppt/slides/slide7.xml><?xml version="1.0" encoding="utf-8"?>
+<p:sld xmlns:a="http://schemas.openxmlformats.org/drawingml/2006/main" xmlns:r="http://schemas.openxmlformats.org/officeDocument/2006/relationships" xmlns:p="http://schemas.openxmlformats.org/presentationml/2006/main">
+  <p:cSld>
+    <p:spTree>
+      <p:nvGrpSpPr>
+        <p:cNvPr id="1" name=""/>
+        <p:cNvGrpSpPr/>
+        <p:nvPr/>
+      </p:nvGrpSpPr>
+      <p:grpSpPr>
+        <a:xfrm>
+          <a:off x="0" y="0"/>
+          <a:ext cx="0" cy="0"/>
+          <a:chOff x="0" y="0"/>
+          <a:chExt cx="0" cy="0"/>
+        </a:xfrm>
+      </p:grpSpPr>
+      <p:sp>
+        <p:nvSpPr>
           <p:cNvPr id="2" name="タイトル 1"/>
           <p:cNvSpPr>
             <a:spLocks noGrp="1"/>
@@ -3992,8 +4161,8 @@
         </p:nvSpPr>
         <p:spPr>
           <a:xfrm rot="16200000">
-            <a:off x="2887820" y="-271418"/>
-            <a:ext cx="3196470" cy="7295710"/>
+            <a:off x="2275424" y="340978"/>
+            <a:ext cx="4421262" cy="7295710"/>
           </a:xfrm>
         </p:spPr>
         <p:txBody>
@@ -4062,17 +4231,41 @@
               <a:t>万点以上の高品質なフリー画像素材 </a:t>
             </a:r>
             <a:r>
-              <a:rPr lang="en-US" altLang="ja-JP" dirty="0">
+              <a:rPr lang="en-US" altLang="ja-JP" dirty="0" smtClean="0">
                 <a:hlinkClick r:id="rId3"/>
               </a:rPr>
-              <a:t>- </a:t>
-            </a:r>
-            <a:r>
-              <a:rPr lang="en-US" altLang="ja-JP" dirty="0" err="1">
+              <a:t>– </a:t>
+            </a:r>
+            <a:r>
+              <a:rPr lang="en-US" altLang="ja-JP" dirty="0" err="1" smtClean="0">
                 <a:hlinkClick r:id="rId3"/>
               </a:rPr>
               <a:t>Pixabay</a:t>
             </a:r>
+            <a:endParaRPr lang="en-US" altLang="ja-JP" dirty="0" smtClean="0"/>
+          </a:p>
+          <a:p>
+            <a:pPr marL="0" indent="0">
+              <a:buNone/>
+            </a:pPr>
+            <a:r>
+              <a:rPr kumimoji="1" lang="ja-JP" altLang="en-US" dirty="0" smtClean="0"/>
+              <a:t>タイトルなど一部に</a:t>
+            </a:r>
+            <a:r>
+              <a:rPr kumimoji="1" lang="en-US" altLang="ja-JP" dirty="0" smtClean="0"/>
+              <a:t>AI</a:t>
+            </a:r>
+            <a:r>
+              <a:rPr kumimoji="1" lang="ja-JP" altLang="en-US" dirty="0" smtClean="0"/>
+              <a:t>を使ってイラスト作成をしてもらいました</a:t>
+            </a:r>
+            <a:endParaRPr kumimoji="1" lang="en-US" altLang="ja-JP" dirty="0"/>
+          </a:p>
+          <a:p>
+            <a:pPr marL="0" indent="0">
+              <a:buNone/>
+            </a:pPr>
             <a:endParaRPr kumimoji="1" lang="ja-JP" altLang="en-US" dirty="0"/>
           </a:p>
         </p:txBody>

--- a/制作物紹介.pptx
+++ b/制作物紹介.pptx
@@ -249,7 +249,7 @@
           <a:p>
             <a:fld id="{FF280E2F-2207-4CE9-9E61-0F84AC327644}" type="datetimeFigureOut">
               <a:rPr kumimoji="1" lang="ja-JP" altLang="en-US" smtClean="0"/>
-              <a:t>2026/9/28</a:t>
+              <a:t>2026/10/6</a:t>
             </a:fld>
             <a:endParaRPr kumimoji="1" lang="ja-JP" altLang="en-US"/>
           </a:p>
@@ -451,7 +451,7 @@
           <a:p>
             <a:fld id="{FF280E2F-2207-4CE9-9E61-0F84AC327644}" type="datetimeFigureOut">
               <a:rPr kumimoji="1" lang="ja-JP" altLang="en-US" smtClean="0"/>
-              <a:t>2026/9/28</a:t>
+              <a:t>2026/10/6</a:t>
             </a:fld>
             <a:endParaRPr kumimoji="1" lang="ja-JP" altLang="en-US"/>
           </a:p>
@@ -663,7 +663,7 @@
           <a:p>
             <a:fld id="{FF280E2F-2207-4CE9-9E61-0F84AC327644}" type="datetimeFigureOut">
               <a:rPr kumimoji="1" lang="ja-JP" altLang="en-US" smtClean="0"/>
-              <a:t>2026/9/28</a:t>
+              <a:t>2026/10/6</a:t>
             </a:fld>
             <a:endParaRPr kumimoji="1" lang="ja-JP" altLang="en-US"/>
           </a:p>
@@ -865,7 +865,7 @@
           <a:p>
             <a:fld id="{FF280E2F-2207-4CE9-9E61-0F84AC327644}" type="datetimeFigureOut">
               <a:rPr kumimoji="1" lang="ja-JP" altLang="en-US" smtClean="0"/>
-              <a:t>2026/9/28</a:t>
+              <a:t>2026/10/6</a:t>
             </a:fld>
             <a:endParaRPr kumimoji="1" lang="ja-JP" altLang="en-US"/>
           </a:p>
@@ -1111,7 +1111,7 @@
           <a:p>
             <a:fld id="{FF280E2F-2207-4CE9-9E61-0F84AC327644}" type="datetimeFigureOut">
               <a:rPr kumimoji="1" lang="ja-JP" altLang="en-US" smtClean="0"/>
-              <a:t>2026/9/28</a:t>
+              <a:t>2026/10/6</a:t>
             </a:fld>
             <a:endParaRPr kumimoji="1" lang="ja-JP" altLang="en-US"/>
           </a:p>
@@ -1407,7 +1407,7 @@
           <a:p>
             <a:fld id="{FF280E2F-2207-4CE9-9E61-0F84AC327644}" type="datetimeFigureOut">
               <a:rPr kumimoji="1" lang="ja-JP" altLang="en-US" smtClean="0"/>
-              <a:t>2026/9/28</a:t>
+              <a:t>2026/10/6</a:t>
             </a:fld>
             <a:endParaRPr kumimoji="1" lang="ja-JP" altLang="en-US"/>
           </a:p>
@@ -1838,7 +1838,7 @@
           <a:p>
             <a:fld id="{FF280E2F-2207-4CE9-9E61-0F84AC327644}" type="datetimeFigureOut">
               <a:rPr kumimoji="1" lang="ja-JP" altLang="en-US" smtClean="0"/>
-              <a:t>2026/9/28</a:t>
+              <a:t>2026/10/6</a:t>
             </a:fld>
             <a:endParaRPr kumimoji="1" lang="ja-JP" altLang="en-US"/>
           </a:p>
@@ -1956,7 +1956,7 @@
           <a:p>
             <a:fld id="{FF280E2F-2207-4CE9-9E61-0F84AC327644}" type="datetimeFigureOut">
               <a:rPr kumimoji="1" lang="ja-JP" altLang="en-US" smtClean="0"/>
-              <a:t>2026/9/28</a:t>
+              <a:t>2026/10/6</a:t>
             </a:fld>
             <a:endParaRPr kumimoji="1" lang="ja-JP" altLang="en-US"/>
           </a:p>
@@ -2051,7 +2051,7 @@
           <a:p>
             <a:fld id="{FF280E2F-2207-4CE9-9E61-0F84AC327644}" type="datetimeFigureOut">
               <a:rPr kumimoji="1" lang="ja-JP" altLang="en-US" smtClean="0"/>
-              <a:t>2026/9/28</a:t>
+              <a:t>2026/10/6</a:t>
             </a:fld>
             <a:endParaRPr kumimoji="1" lang="ja-JP" altLang="en-US"/>
           </a:p>
@@ -2360,7 +2360,7 @@
           <a:p>
             <a:fld id="{FF280E2F-2207-4CE9-9E61-0F84AC327644}" type="datetimeFigureOut">
               <a:rPr kumimoji="1" lang="ja-JP" altLang="en-US" smtClean="0"/>
-              <a:t>2026/9/28</a:t>
+              <a:t>2026/10/6</a:t>
             </a:fld>
             <a:endParaRPr kumimoji="1" lang="ja-JP" altLang="en-US"/>
           </a:p>
@@ -2613,7 +2613,7 @@
           <a:p>
             <a:fld id="{FF280E2F-2207-4CE9-9E61-0F84AC327644}" type="datetimeFigureOut">
               <a:rPr kumimoji="1" lang="ja-JP" altLang="en-US" smtClean="0"/>
-              <a:t>2026/9/28</a:t>
+              <a:t>2026/10/6</a:t>
             </a:fld>
             <a:endParaRPr kumimoji="1" lang="ja-JP" altLang="en-US"/>
           </a:p>
@@ -2858,7 +2858,7 @@
           <a:p>
             <a:fld id="{FF280E2F-2207-4CE9-9E61-0F84AC327644}" type="datetimeFigureOut">
               <a:rPr kumimoji="1" lang="ja-JP" altLang="en-US" smtClean="0"/>
-              <a:t>2026/9/28</a:t>
+              <a:t>2026/10/6</a:t>
             </a:fld>
             <a:endParaRPr kumimoji="1" lang="ja-JP" altLang="en-US"/>
           </a:p>
@@ -3398,7 +3398,59 @@
             </a:r>
             <a:r>
               <a:rPr lang="ja-JP" altLang="en-US" dirty="0" smtClean="0"/>
-              <a:t>期間：１週間程度</a:t>
+              <a:t>期間</a:t>
+            </a:r>
+            <a:r>
+              <a:rPr lang="ja-JP" altLang="en-US" dirty="0" smtClean="0"/>
+              <a:t>：</a:t>
+            </a:r>
+            <a:r>
+              <a:rPr lang="en-US" altLang="ja-JP" dirty="0" smtClean="0"/>
+              <a:t>2026</a:t>
+            </a:r>
+            <a:r>
+              <a:rPr lang="ja-JP" altLang="en-US" dirty="0" smtClean="0"/>
+              <a:t>年</a:t>
+            </a:r>
+            <a:r>
+              <a:rPr lang="en-US" altLang="ja-JP" dirty="0" smtClean="0"/>
+              <a:t>7</a:t>
+            </a:r>
+            <a:r>
+              <a:rPr lang="ja-JP" altLang="en-US" dirty="0" smtClean="0"/>
+              <a:t>月</a:t>
+            </a:r>
+            <a:r>
+              <a:rPr lang="en-US" altLang="ja-JP" dirty="0" smtClean="0"/>
+              <a:t>2</a:t>
+            </a:r>
+            <a:r>
+              <a:rPr lang="ja-JP" altLang="en-US" dirty="0" smtClean="0"/>
+              <a:t>日～</a:t>
+            </a:r>
+            <a:r>
+              <a:rPr lang="en-US" altLang="ja-JP" dirty="0"/>
+              <a:t> 2026</a:t>
+            </a:r>
+            <a:r>
+              <a:rPr lang="ja-JP" altLang="en-US" dirty="0"/>
+              <a:t>年</a:t>
+            </a:r>
+            <a:r>
+              <a:rPr lang="en-US" altLang="ja-JP" dirty="0"/>
+              <a:t>7</a:t>
+            </a:r>
+            <a:r>
+              <a:rPr lang="ja-JP" altLang="en-US" dirty="0" smtClean="0"/>
+              <a:t>月</a:t>
+            </a:r>
+            <a:r>
+              <a:rPr lang="en-US" altLang="ja-JP" dirty="0" smtClean="0"/>
+              <a:t>10</a:t>
+            </a:r>
+            <a:r>
+              <a:rPr lang="ja-JP" altLang="en-US" dirty="0" smtClean="0"/>
+              <a:t>日</a:t>
             </a:r>
             <a:endParaRPr kumimoji="1" lang="ja-JP" altLang="en-US" dirty="0"/>
           </a:p>
